--- a/Presentation/Global AI Adoption & Workforce Impact DatasetNEW.pptx
+++ b/Presentation/Global AI Adoption & Workforce Impact DatasetNEW.pptx
@@ -4997,6 +4997,36 @@
             </a:r>
           </a:p>
           <a:p>
+            <a:pPr marL="0" marR="0" lvl="0" indent="0" algn="l" defTabSz="914400" rtl="0" eaLnBrk="1" fontAlgn="auto" latinLnBrk="0" hangingPunct="1">
+              <a:lnSpc>
+                <a:spcPct val="100000"/>
+              </a:lnSpc>
+              <a:spcBef>
+                <a:spcPts val="0"/>
+              </a:spcBef>
+              <a:spcAft>
+                <a:spcPts val="0"/>
+              </a:spcAft>
+              <a:buClrTx/>
+              <a:buSzTx/>
+              <a:buFontTx/>
+              <a:buNone/>
+              <a:tabLst/>
+              <a:defRPr/>
+            </a:pPr>
+            <a:r>
+              <a:rPr lang="en-US" sz="1200" kern="1200" dirty="0">
+                <a:solidFill>
+                  <a:schemeClr val="tx1"/>
+                </a:solidFill>
+                <a:latin typeface="+mn-lt"/>
+                <a:ea typeface="+mn-ea"/>
+                <a:cs typeface="+mn-cs"/>
+              </a:rPr>
+              <a:t>Interesting points: While evaluating correlation, it was observed that cost reduction did not have any strong correlation. The data shows that companies are moderately seeing revenue growth and cost reduction but Productivity changes are huge. Future studies may show different results as less investment in training and baselining is required. </a:t>
+            </a:r>
+          </a:p>
+          <a:p>
             <a:endParaRPr lang="en-US" dirty="0"/>
           </a:p>
         </p:txBody>
@@ -11554,10 +11584,10 @@
         </p:nvGrpSpPr>
         <p:grpSpPr>
           <a:xfrm>
-            <a:off x="9265922" y="2182752"/>
-            <a:ext cx="2032002" cy="1495168"/>
+            <a:off x="9265922" y="2182753"/>
+            <a:ext cx="2032002" cy="753965"/>
             <a:chOff x="9990435" y="2182752"/>
-            <a:chExt cx="1137252" cy="1495168"/>
+            <a:chExt cx="1137252" cy="965960"/>
           </a:xfrm>
         </p:grpSpPr>
         <p:sp>
@@ -11575,7 +11605,7 @@
           <p:spPr>
             <a:xfrm>
               <a:off x="9990435" y="2182752"/>
-              <a:ext cx="1114506" cy="1495168"/>
+              <a:ext cx="1114506" cy="965960"/>
             </a:xfrm>
             <a:prstGeom prst="rect">
               <a:avLst/>
@@ -11626,8 +11656,8 @@
           </p:nvSpPr>
           <p:spPr>
             <a:xfrm>
-              <a:off x="10013181" y="2261503"/>
-              <a:ext cx="1114506" cy="1338828"/>
+              <a:off x="10013181" y="2238306"/>
+              <a:ext cx="1114506" cy="887209"/>
             </a:xfrm>
             <a:prstGeom prst="rect">
               <a:avLst/>
@@ -11643,23 +11673,6 @@
               <a:r>
                 <a:rPr lang="en-US" sz="1200" dirty="0"/>
                 <a:t>AI Maturity          Productivity</a:t>
-              </a:r>
-            </a:p>
-            <a:p>
-              <a:endParaRPr lang="en-US" sz="1200" dirty="0"/>
-            </a:p>
-            <a:p>
-              <a:pPr algn="ctr"/>
-              <a:r>
-                <a:rPr lang="en-US" sz="1500" dirty="0"/>
-                <a:t>r = 0.74</a:t>
-              </a:r>
-            </a:p>
-            <a:p>
-              <a:pPr algn="ctr"/>
-              <a:r>
-                <a:rPr lang="en-US" sz="1500" dirty="0"/>
-                <a:t>p &lt; 0.001</a:t>
               </a:r>
             </a:p>
             <a:p>
@@ -11690,7 +11703,7 @@
         </p:nvSpPr>
         <p:spPr>
           <a:xfrm>
-            <a:off x="10175240" y="2387600"/>
+            <a:off x="10202399" y="2351388"/>
             <a:ext cx="121920" cy="45719"/>
           </a:xfrm>
           <a:prstGeom prst="leftRightArrow">
